--- a/docs/Бунделев_Prez.pptx
+++ b/docs/Бунделев_Prez.pptx
@@ -7,20 +7,17 @@
     <p:sldMasterId id="2147483833" r:id="rId3"/>
   </p:sldMasterIdLst>
   <p:notesMasterIdLst>
-    <p:notesMasterId r:id="rId12"/>
+    <p:notesMasterId r:id="rId9"/>
   </p:notesMasterIdLst>
   <p:handoutMasterIdLst>
-    <p:handoutMasterId r:id="rId13"/>
+    <p:handoutMasterId r:id="rId10"/>
   </p:handoutMasterIdLst>
   <p:sldIdLst>
     <p:sldId id="1171" r:id="rId4"/>
     <p:sldId id="1204" r:id="rId5"/>
-    <p:sldId id="1209" r:id="rId6"/>
-    <p:sldId id="1210" r:id="rId7"/>
-    <p:sldId id="1211" r:id="rId8"/>
-    <p:sldId id="1212" r:id="rId9"/>
-    <p:sldId id="1213" r:id="rId10"/>
-    <p:sldId id="1214" r:id="rId11"/>
+    <p:sldId id="1211" r:id="rId6"/>
+    <p:sldId id="1212" r:id="rId7"/>
+    <p:sldId id="1213" r:id="rId8"/>
   </p:sldIdLst>
   <p:sldSz cx="12192000" cy="6858000"/>
   <p:notesSz cx="6858000" cy="9144000"/>
@@ -264,7 +261,7 @@
           <a:p>
             <a:fld id="{85FFCE6C-E7E6-4C35-A8B5-8F9784AA6873}" type="datetimeFigureOut">
               <a:rPr lang="en-US" smtClean="0"/>
-              <a:t>4/7/2026</a:t>
+              <a:t>6/4/2026</a:t>
             </a:fld>
             <a:endParaRPr lang="en-US"/>
           </a:p>
@@ -440,7 +437,7 @@
           </a:lstStyle>
           <a:p>
             <a:fld id="{CCD46D5B-6567-794D-8CBA-5CCA973D6774}" type="datetimeFigureOut">
-              <a:t>07.04.2026</a:t>
+              <a:t>04.06.2026</a:t>
             </a:fld>
             <a:endParaRPr lang="ru-RU"/>
           </a:p>
@@ -823,222 +820,6 @@
         <p:cNvPr id="1" name="">
           <a:extLst>
             <a:ext uri="{FF2B5EF4-FFF2-40B4-BE49-F238E27FC236}">
-              <a16:creationId xmlns:a16="http://schemas.microsoft.com/office/drawing/2014/main" id="{EA956A8C-BB71-00A8-FC56-28B2122E8495}"/>
-            </a:ext>
-          </a:extLst>
-        </p:cNvPr>
-        <p:cNvGrpSpPr/>
-        <p:nvPr/>
-      </p:nvGrpSpPr>
-      <p:grpSpPr>
-        <a:xfrm>
-          <a:off x="0" y="0"/>
-          <a:ext cx="0" cy="0"/>
-          <a:chOff x="0" y="0"/>
-          <a:chExt cx="0" cy="0"/>
-        </a:xfrm>
-      </p:grpSpPr>
-      <p:sp>
-        <p:nvSpPr>
-          <p:cNvPr id="2" name="Образ слайда 1">
-            <a:extLst>
-              <a:ext uri="{FF2B5EF4-FFF2-40B4-BE49-F238E27FC236}">
-                <a16:creationId xmlns:a16="http://schemas.microsoft.com/office/drawing/2014/main" id="{006A3114-44C1-4ACB-BE7B-3B4C94830CF7}"/>
-              </a:ext>
-            </a:extLst>
-          </p:cNvPr>
-          <p:cNvSpPr>
-            <a:spLocks noGrp="1" noRot="1" noChangeAspect="1"/>
-          </p:cNvSpPr>
-          <p:nvPr>
-            <p:ph type="sldImg"/>
-          </p:nvPr>
-        </p:nvSpPr>
-        <p:spPr/>
-      </p:sp>
-      <p:sp>
-        <p:nvSpPr>
-          <p:cNvPr id="3" name="Заметки 2">
-            <a:extLst>
-              <a:ext uri="{FF2B5EF4-FFF2-40B4-BE49-F238E27FC236}">
-                <a16:creationId xmlns:a16="http://schemas.microsoft.com/office/drawing/2014/main" id="{8C7D30FE-196C-7687-7A38-5ADC7C37F888}"/>
-              </a:ext>
-            </a:extLst>
-          </p:cNvPr>
-          <p:cNvSpPr>
-            <a:spLocks noGrp="1"/>
-          </p:cNvSpPr>
-          <p:nvPr>
-            <p:ph type="body" idx="1"/>
-          </p:nvPr>
-        </p:nvSpPr>
-        <p:spPr/>
-        <p:txBody>
-          <a:bodyPr/>
-          <a:lstStyle/>
-          <a:p>
-            <a:endParaRPr lang="ru-RU" dirty="0"/>
-          </a:p>
-        </p:txBody>
-      </p:sp>
-      <p:sp>
-        <p:nvSpPr>
-          <p:cNvPr id="4" name="Номер слайда 3">
-            <a:extLst>
-              <a:ext uri="{FF2B5EF4-FFF2-40B4-BE49-F238E27FC236}">
-                <a16:creationId xmlns:a16="http://schemas.microsoft.com/office/drawing/2014/main" id="{9807DB61-FA45-2EC3-5C27-EACE81B28E33}"/>
-              </a:ext>
-            </a:extLst>
-          </p:cNvPr>
-          <p:cNvSpPr>
-            <a:spLocks noGrp="1"/>
-          </p:cNvSpPr>
-          <p:nvPr>
-            <p:ph type="sldNum" sz="quarter" idx="5"/>
-          </p:nvPr>
-        </p:nvSpPr>
-        <p:spPr/>
-        <p:txBody>
-          <a:bodyPr/>
-          <a:lstStyle/>
-          <a:p>
-            <a:fld id="{BCEDE2F8-02D4-C448-B364-7246A6689E7F}" type="slidenum">
-              <a:rPr lang="ru-RU" smtClean="0"/>
-              <a:t>3</a:t>
-            </a:fld>
-            <a:endParaRPr lang="ru-RU" dirty="0"/>
-          </a:p>
-        </p:txBody>
-      </p:sp>
-    </p:spTree>
-    <p:extLst>
-      <p:ext uri="{BB962C8B-B14F-4D97-AF65-F5344CB8AC3E}">
-        <p14:creationId xmlns:p14="http://schemas.microsoft.com/office/powerpoint/2010/main" val="3704684035"/>
-      </p:ext>
-    </p:extLst>
-  </p:cSld>
-  <p:clrMapOvr>
-    <a:masterClrMapping/>
-  </p:clrMapOvr>
-</p:notes>
-</file>
-
-<file path=ppt/notesSlides/notesSlide3.xml><?xml version="1.0" encoding="utf-8"?>
-<p:notes xmlns:a="http://schemas.openxmlformats.org/drawingml/2006/main" xmlns:r="http://schemas.openxmlformats.org/officeDocument/2006/relationships" xmlns:p="http://schemas.openxmlformats.org/presentationml/2006/main">
-  <p:cSld>
-    <p:spTree>
-      <p:nvGrpSpPr>
-        <p:cNvPr id="1" name="">
-          <a:extLst>
-            <a:ext uri="{FF2B5EF4-FFF2-40B4-BE49-F238E27FC236}">
-              <a16:creationId xmlns:a16="http://schemas.microsoft.com/office/drawing/2014/main" id="{D22DB7B3-2D50-8596-DA6A-028B07A3A080}"/>
-            </a:ext>
-          </a:extLst>
-        </p:cNvPr>
-        <p:cNvGrpSpPr/>
-        <p:nvPr/>
-      </p:nvGrpSpPr>
-      <p:grpSpPr>
-        <a:xfrm>
-          <a:off x="0" y="0"/>
-          <a:ext cx="0" cy="0"/>
-          <a:chOff x="0" y="0"/>
-          <a:chExt cx="0" cy="0"/>
-        </a:xfrm>
-      </p:grpSpPr>
-      <p:sp>
-        <p:nvSpPr>
-          <p:cNvPr id="2" name="Образ слайда 1">
-            <a:extLst>
-              <a:ext uri="{FF2B5EF4-FFF2-40B4-BE49-F238E27FC236}">
-                <a16:creationId xmlns:a16="http://schemas.microsoft.com/office/drawing/2014/main" id="{71460063-1D4C-BF6E-0DB4-BC66C9050B63}"/>
-              </a:ext>
-            </a:extLst>
-          </p:cNvPr>
-          <p:cNvSpPr>
-            <a:spLocks noGrp="1" noRot="1" noChangeAspect="1"/>
-          </p:cNvSpPr>
-          <p:nvPr>
-            <p:ph type="sldImg"/>
-          </p:nvPr>
-        </p:nvSpPr>
-        <p:spPr/>
-      </p:sp>
-      <p:sp>
-        <p:nvSpPr>
-          <p:cNvPr id="3" name="Заметки 2">
-            <a:extLst>
-              <a:ext uri="{FF2B5EF4-FFF2-40B4-BE49-F238E27FC236}">
-                <a16:creationId xmlns:a16="http://schemas.microsoft.com/office/drawing/2014/main" id="{F2C5138B-434E-C537-3573-DB2DF72096B3}"/>
-              </a:ext>
-            </a:extLst>
-          </p:cNvPr>
-          <p:cNvSpPr>
-            <a:spLocks noGrp="1"/>
-          </p:cNvSpPr>
-          <p:nvPr>
-            <p:ph type="body" idx="1"/>
-          </p:nvPr>
-        </p:nvSpPr>
-        <p:spPr/>
-        <p:txBody>
-          <a:bodyPr/>
-          <a:lstStyle/>
-          <a:p>
-            <a:endParaRPr lang="ru-RU" dirty="0"/>
-          </a:p>
-        </p:txBody>
-      </p:sp>
-      <p:sp>
-        <p:nvSpPr>
-          <p:cNvPr id="4" name="Номер слайда 3">
-            <a:extLst>
-              <a:ext uri="{FF2B5EF4-FFF2-40B4-BE49-F238E27FC236}">
-                <a16:creationId xmlns:a16="http://schemas.microsoft.com/office/drawing/2014/main" id="{7F641B3F-3FCC-D6F7-4F21-C0CBC8C1BA93}"/>
-              </a:ext>
-            </a:extLst>
-          </p:cNvPr>
-          <p:cNvSpPr>
-            <a:spLocks noGrp="1"/>
-          </p:cNvSpPr>
-          <p:nvPr>
-            <p:ph type="sldNum" sz="quarter" idx="5"/>
-          </p:nvPr>
-        </p:nvSpPr>
-        <p:spPr/>
-        <p:txBody>
-          <a:bodyPr/>
-          <a:lstStyle/>
-          <a:p>
-            <a:fld id="{BCEDE2F8-02D4-C448-B364-7246A6689E7F}" type="slidenum">
-              <a:rPr lang="ru-RU" smtClean="0"/>
-              <a:t>4</a:t>
-            </a:fld>
-            <a:endParaRPr lang="ru-RU" dirty="0"/>
-          </a:p>
-        </p:txBody>
-      </p:sp>
-    </p:spTree>
-    <p:extLst>
-      <p:ext uri="{BB962C8B-B14F-4D97-AF65-F5344CB8AC3E}">
-        <p14:creationId xmlns:p14="http://schemas.microsoft.com/office/powerpoint/2010/main" val="358094001"/>
-      </p:ext>
-    </p:extLst>
-  </p:cSld>
-  <p:clrMapOvr>
-    <a:masterClrMapping/>
-  </p:clrMapOvr>
-</p:notes>
-</file>
-
-<file path=ppt/notesSlides/notesSlide4.xml><?xml version="1.0" encoding="utf-8"?>
-<p:notes xmlns:a="http://schemas.openxmlformats.org/drawingml/2006/main" xmlns:r="http://schemas.openxmlformats.org/officeDocument/2006/relationships" xmlns:p="http://schemas.openxmlformats.org/presentationml/2006/main">
-  <p:cSld>
-    <p:spTree>
-      <p:nvGrpSpPr>
-        <p:cNvPr id="1" name="">
-          <a:extLst>
-            <a:ext uri="{FF2B5EF4-FFF2-40B4-BE49-F238E27FC236}">
               <a16:creationId xmlns:a16="http://schemas.microsoft.com/office/drawing/2014/main" id="{8378CFB1-EA22-1E9E-7BC8-93110DF0BBF9}"/>
             </a:ext>
           </a:extLst>
@@ -1120,7 +901,7 @@
           <a:p>
             <a:fld id="{BCEDE2F8-02D4-C448-B364-7246A6689E7F}" type="slidenum">
               <a:rPr lang="ru-RU" smtClean="0"/>
-              <a:t>5</a:t>
+              <a:t>3</a:t>
             </a:fld>
             <a:endParaRPr lang="ru-RU" dirty="0"/>
           </a:p>
@@ -1139,7 +920,7 @@
 </p:notes>
 </file>
 
-<file path=ppt/notesSlides/notesSlide5.xml><?xml version="1.0" encoding="utf-8"?>
+<file path=ppt/notesSlides/notesSlide3.xml><?xml version="1.0" encoding="utf-8"?>
 <p:notes xmlns:a="http://schemas.openxmlformats.org/drawingml/2006/main" xmlns:r="http://schemas.openxmlformats.org/officeDocument/2006/relationships" xmlns:p="http://schemas.openxmlformats.org/presentationml/2006/main">
   <p:cSld>
     <p:spTree>
@@ -1228,7 +1009,7 @@
           <a:p>
             <a:fld id="{BCEDE2F8-02D4-C448-B364-7246A6689E7F}" type="slidenum">
               <a:rPr lang="ru-RU" smtClean="0"/>
-              <a:t>6</a:t>
+              <a:t>4</a:t>
             </a:fld>
             <a:endParaRPr lang="ru-RU" dirty="0"/>
           </a:p>
@@ -1247,7 +1028,7 @@
 </p:notes>
 </file>
 
-<file path=ppt/notesSlides/notesSlide6.xml><?xml version="1.0" encoding="utf-8"?>
+<file path=ppt/notesSlides/notesSlide4.xml><?xml version="1.0" encoding="utf-8"?>
 <p:notes xmlns:a="http://schemas.openxmlformats.org/drawingml/2006/main" xmlns:r="http://schemas.openxmlformats.org/officeDocument/2006/relationships" xmlns:p="http://schemas.openxmlformats.org/presentationml/2006/main">
   <p:cSld>
     <p:spTree>
@@ -1336,7 +1117,7 @@
           <a:p>
             <a:fld id="{BCEDE2F8-02D4-C448-B364-7246A6689E7F}" type="slidenum">
               <a:rPr lang="ru-RU" smtClean="0"/>
-              <a:t>7</a:t>
+              <a:t>5</a:t>
             </a:fld>
             <a:endParaRPr lang="ru-RU" dirty="0"/>
           </a:p>
@@ -1346,114 +1127,6 @@
     <p:extLst>
       <p:ext uri="{BB962C8B-B14F-4D97-AF65-F5344CB8AC3E}">
         <p14:creationId xmlns:p14="http://schemas.microsoft.com/office/powerpoint/2010/main" val="2217948703"/>
-      </p:ext>
-    </p:extLst>
-  </p:cSld>
-  <p:clrMapOvr>
-    <a:masterClrMapping/>
-  </p:clrMapOvr>
-</p:notes>
-</file>
-
-<file path=ppt/notesSlides/notesSlide7.xml><?xml version="1.0" encoding="utf-8"?>
-<p:notes xmlns:a="http://schemas.openxmlformats.org/drawingml/2006/main" xmlns:r="http://schemas.openxmlformats.org/officeDocument/2006/relationships" xmlns:p="http://schemas.openxmlformats.org/presentationml/2006/main">
-  <p:cSld>
-    <p:spTree>
-      <p:nvGrpSpPr>
-        <p:cNvPr id="1" name="">
-          <a:extLst>
-            <a:ext uri="{FF2B5EF4-FFF2-40B4-BE49-F238E27FC236}">
-              <a16:creationId xmlns:a16="http://schemas.microsoft.com/office/drawing/2014/main" id="{3F43FC72-37BE-8195-DDF1-DF0133C3C679}"/>
-            </a:ext>
-          </a:extLst>
-        </p:cNvPr>
-        <p:cNvGrpSpPr/>
-        <p:nvPr/>
-      </p:nvGrpSpPr>
-      <p:grpSpPr>
-        <a:xfrm>
-          <a:off x="0" y="0"/>
-          <a:ext cx="0" cy="0"/>
-          <a:chOff x="0" y="0"/>
-          <a:chExt cx="0" cy="0"/>
-        </a:xfrm>
-      </p:grpSpPr>
-      <p:sp>
-        <p:nvSpPr>
-          <p:cNvPr id="2" name="Образ слайда 1">
-            <a:extLst>
-              <a:ext uri="{FF2B5EF4-FFF2-40B4-BE49-F238E27FC236}">
-                <a16:creationId xmlns:a16="http://schemas.microsoft.com/office/drawing/2014/main" id="{EAF84A5A-2849-447D-3E41-05379736DE21}"/>
-              </a:ext>
-            </a:extLst>
-          </p:cNvPr>
-          <p:cNvSpPr>
-            <a:spLocks noGrp="1" noRot="1" noChangeAspect="1"/>
-          </p:cNvSpPr>
-          <p:nvPr>
-            <p:ph type="sldImg"/>
-          </p:nvPr>
-        </p:nvSpPr>
-        <p:spPr/>
-      </p:sp>
-      <p:sp>
-        <p:nvSpPr>
-          <p:cNvPr id="3" name="Заметки 2">
-            <a:extLst>
-              <a:ext uri="{FF2B5EF4-FFF2-40B4-BE49-F238E27FC236}">
-                <a16:creationId xmlns:a16="http://schemas.microsoft.com/office/drawing/2014/main" id="{D6265A95-E482-FFAB-E5AC-23FD0770A69B}"/>
-              </a:ext>
-            </a:extLst>
-          </p:cNvPr>
-          <p:cNvSpPr>
-            <a:spLocks noGrp="1"/>
-          </p:cNvSpPr>
-          <p:nvPr>
-            <p:ph type="body" idx="1"/>
-          </p:nvPr>
-        </p:nvSpPr>
-        <p:spPr/>
-        <p:txBody>
-          <a:bodyPr/>
-          <a:lstStyle/>
-          <a:p>
-            <a:endParaRPr lang="ru-RU" dirty="0"/>
-          </a:p>
-        </p:txBody>
-      </p:sp>
-      <p:sp>
-        <p:nvSpPr>
-          <p:cNvPr id="4" name="Номер слайда 3">
-            <a:extLst>
-              <a:ext uri="{FF2B5EF4-FFF2-40B4-BE49-F238E27FC236}">
-                <a16:creationId xmlns:a16="http://schemas.microsoft.com/office/drawing/2014/main" id="{69601E90-6EE4-3185-2EC2-BF8E506C47AF}"/>
-              </a:ext>
-            </a:extLst>
-          </p:cNvPr>
-          <p:cNvSpPr>
-            <a:spLocks noGrp="1"/>
-          </p:cNvSpPr>
-          <p:nvPr>
-            <p:ph type="sldNum" sz="quarter" idx="5"/>
-          </p:nvPr>
-        </p:nvSpPr>
-        <p:spPr/>
-        <p:txBody>
-          <a:bodyPr/>
-          <a:lstStyle/>
-          <a:p>
-            <a:fld id="{BCEDE2F8-02D4-C448-B364-7246A6689E7F}" type="slidenum">
-              <a:rPr lang="ru-RU" smtClean="0"/>
-              <a:t>8</a:t>
-            </a:fld>
-            <a:endParaRPr lang="ru-RU" dirty="0"/>
-          </a:p>
-        </p:txBody>
-      </p:sp>
-    </p:spTree>
-    <p:extLst>
-      <p:ext uri="{BB962C8B-B14F-4D97-AF65-F5344CB8AC3E}">
-        <p14:creationId xmlns:p14="http://schemas.microsoft.com/office/powerpoint/2010/main" val="1662257022"/>
       </p:ext>
     </p:extLst>
   </p:cSld>
@@ -5463,696 +5136,6 @@
         <p:cNvPr id="1" name="">
           <a:extLst>
             <a:ext uri="{FF2B5EF4-FFF2-40B4-BE49-F238E27FC236}">
-              <a16:creationId xmlns:a16="http://schemas.microsoft.com/office/drawing/2014/main" id="{BE68FD7C-235A-1721-A70C-3AE96C228FED}"/>
-            </a:ext>
-          </a:extLst>
-        </p:cNvPr>
-        <p:cNvGrpSpPr/>
-        <p:nvPr/>
-      </p:nvGrpSpPr>
-      <p:grpSpPr>
-        <a:xfrm>
-          <a:off x="0" y="0"/>
-          <a:ext cx="0" cy="0"/>
-          <a:chOff x="0" y="0"/>
-          <a:chExt cx="0" cy="0"/>
-        </a:xfrm>
-      </p:grpSpPr>
-      <p:sp>
-        <p:nvSpPr>
-          <p:cNvPr id="9" name="Заголовок 8">
-            <a:extLst>
-              <a:ext uri="{FF2B5EF4-FFF2-40B4-BE49-F238E27FC236}">
-                <a16:creationId xmlns:a16="http://schemas.microsoft.com/office/drawing/2014/main" id="{FC60863D-1DF3-C70A-7F03-CB34E2930766}"/>
-              </a:ext>
-            </a:extLst>
-          </p:cNvPr>
-          <p:cNvSpPr>
-            <a:spLocks noGrp="1"/>
-          </p:cNvSpPr>
-          <p:nvPr>
-            <p:ph type="title"/>
-          </p:nvPr>
-        </p:nvSpPr>
-        <p:spPr/>
-        <p:txBody>
-          <a:bodyPr/>
-          <a:lstStyle/>
-          <a:p>
-            <a:r>
-              <a:rPr lang="ru-RU" dirty="0"/>
-              <a:t> Ключевые возможности </a:t>
-            </a:r>
-          </a:p>
-        </p:txBody>
-      </p:sp>
-      <p:sp>
-        <p:nvSpPr>
-          <p:cNvPr id="5" name="Текст 4">
-            <a:extLst>
-              <a:ext uri="{FF2B5EF4-FFF2-40B4-BE49-F238E27FC236}">
-                <a16:creationId xmlns:a16="http://schemas.microsoft.com/office/drawing/2014/main" id="{C87E4A82-FDD7-9198-B022-571FD9AE51E8}"/>
-              </a:ext>
-            </a:extLst>
-          </p:cNvPr>
-          <p:cNvSpPr>
-            <a:spLocks noGrp="1"/>
-          </p:cNvSpPr>
-          <p:nvPr>
-            <p:ph type="body" sz="quarter" idx="12"/>
-          </p:nvPr>
-        </p:nvSpPr>
-        <p:spPr>
-          <a:xfrm>
-            <a:off x="550864" y="1341438"/>
-            <a:ext cx="3666573" cy="5040312"/>
-          </a:xfrm>
-        </p:spPr>
-        <p:txBody>
-          <a:bodyPr>
-            <a:normAutofit/>
-          </a:bodyPr>
-          <a:lstStyle/>
-          <a:p>
-            <a:pPr lvl="5">
-              <a:lnSpc>
-                <a:spcPct val="120000"/>
-              </a:lnSpc>
-            </a:pPr>
-            <a:r>
-              <a:rPr lang="ru-RU" dirty="0"/>
-              <a:t>Управление проектами: Канбан-доски, спринты, чаты (общие, приватные, по задачам).</a:t>
-            </a:r>
-          </a:p>
-          <a:p>
-            <a:pPr lvl="5">
-              <a:lnSpc>
-                <a:spcPct val="120000"/>
-              </a:lnSpc>
-            </a:pPr>
-            <a:r>
-              <a:rPr lang="ru-RU" dirty="0"/>
-              <a:t>Интеграция с </a:t>
-            </a:r>
-            <a:r>
-              <a:rPr lang="ru-RU" dirty="0" err="1"/>
-              <a:t>GitHub</a:t>
-            </a:r>
-            <a:r>
-              <a:rPr lang="ru-RU" dirty="0"/>
-              <a:t>: Автоматический учет активности и коммитов.</a:t>
-            </a:r>
-          </a:p>
-          <a:p>
-            <a:pPr lvl="5">
-              <a:lnSpc>
-                <a:spcPct val="120000"/>
-              </a:lnSpc>
-            </a:pPr>
-            <a:r>
-              <a:rPr lang="ru-RU" dirty="0"/>
-              <a:t>Прозрачность процесса: Преподаватели видят прогресс, студенты получают своевременную обратную связь.</a:t>
-            </a:r>
-          </a:p>
-          <a:p>
-            <a:pPr lvl="5">
-              <a:lnSpc>
-                <a:spcPct val="120000"/>
-              </a:lnSpc>
-            </a:pPr>
-            <a:r>
-              <a:rPr lang="ru-RU" dirty="0"/>
-              <a:t>Встроенная аналитика: Дашборды и отчеты для оценки прогресса и выставления оценок.</a:t>
-            </a:r>
-          </a:p>
-        </p:txBody>
-      </p:sp>
-      <p:pic>
-        <p:nvPicPr>
-          <p:cNvPr id="4" name="Рисунок 3">
-            <a:extLst>
-              <a:ext uri="{FF2B5EF4-FFF2-40B4-BE49-F238E27FC236}">
-                <a16:creationId xmlns:a16="http://schemas.microsoft.com/office/drawing/2014/main" id="{94DC811D-1A5A-0C66-4C88-84A880858D7F}"/>
-              </a:ext>
-            </a:extLst>
-          </p:cNvPr>
-          <p:cNvPicPr>
-            <a:picLocks noChangeAspect="1"/>
-          </p:cNvPicPr>
-          <p:nvPr/>
-        </p:nvPicPr>
-        <p:blipFill>
-          <a:blip r:embed="rId3"/>
-          <a:stretch>
-            <a:fillRect/>
-          </a:stretch>
-        </p:blipFill>
-        <p:spPr>
-          <a:xfrm>
-            <a:off x="4233079" y="1341438"/>
-            <a:ext cx="2568540" cy="3482348"/>
-          </a:xfrm>
-          <a:prstGeom prst="rect">
-            <a:avLst/>
-          </a:prstGeom>
-        </p:spPr>
-      </p:pic>
-      <p:pic>
-        <p:nvPicPr>
-          <p:cNvPr id="10" name="Рисунок 9">
-            <a:extLst>
-              <a:ext uri="{FF2B5EF4-FFF2-40B4-BE49-F238E27FC236}">
-                <a16:creationId xmlns:a16="http://schemas.microsoft.com/office/drawing/2014/main" id="{2752E48F-AFD8-83C4-D73F-55596E1E0FAA}"/>
-              </a:ext>
-            </a:extLst>
-          </p:cNvPr>
-          <p:cNvPicPr>
-            <a:picLocks noChangeAspect="1"/>
-          </p:cNvPicPr>
-          <p:nvPr/>
-        </p:nvPicPr>
-        <p:blipFill>
-          <a:blip r:embed="rId4"/>
-          <a:stretch>
-            <a:fillRect/>
-          </a:stretch>
-        </p:blipFill>
-        <p:spPr>
-          <a:xfrm>
-            <a:off x="4233079" y="4889240"/>
-            <a:ext cx="2568540" cy="1860675"/>
-          </a:xfrm>
-          <a:prstGeom prst="rect">
-            <a:avLst/>
-          </a:prstGeom>
-        </p:spPr>
-      </p:pic>
-      <p:pic>
-        <p:nvPicPr>
-          <p:cNvPr id="13" name="Рисунок 12">
-            <a:extLst>
-              <a:ext uri="{FF2B5EF4-FFF2-40B4-BE49-F238E27FC236}">
-                <a16:creationId xmlns:a16="http://schemas.microsoft.com/office/drawing/2014/main" id="{B30809B6-2C81-A6AC-7429-1AA168B6DF39}"/>
-              </a:ext>
-            </a:extLst>
-          </p:cNvPr>
-          <p:cNvPicPr>
-            <a:picLocks noChangeAspect="1"/>
-          </p:cNvPicPr>
-          <p:nvPr/>
-        </p:nvPicPr>
-        <p:blipFill>
-          <a:blip r:embed="rId5"/>
-          <a:stretch>
-            <a:fillRect/>
-          </a:stretch>
-        </p:blipFill>
-        <p:spPr>
-          <a:xfrm>
-            <a:off x="6858919" y="1341439"/>
-            <a:ext cx="2170685" cy="1470185"/>
-          </a:xfrm>
-          <a:prstGeom prst="rect">
-            <a:avLst/>
-          </a:prstGeom>
-        </p:spPr>
-      </p:pic>
-      <p:pic>
-        <p:nvPicPr>
-          <p:cNvPr id="15" name="Рисунок 14">
-            <a:extLst>
-              <a:ext uri="{FF2B5EF4-FFF2-40B4-BE49-F238E27FC236}">
-                <a16:creationId xmlns:a16="http://schemas.microsoft.com/office/drawing/2014/main" id="{EEFD1A61-0BE1-9FD3-C471-F2B5D3487E71}"/>
-              </a:ext>
-            </a:extLst>
-          </p:cNvPr>
-          <p:cNvPicPr>
-            <a:picLocks noChangeAspect="1"/>
-          </p:cNvPicPr>
-          <p:nvPr/>
-        </p:nvPicPr>
-        <p:blipFill>
-          <a:blip r:embed="rId6"/>
-          <a:stretch>
-            <a:fillRect/>
-          </a:stretch>
-        </p:blipFill>
-        <p:spPr>
-          <a:xfrm>
-            <a:off x="9061972" y="2027852"/>
-            <a:ext cx="2756803" cy="4409886"/>
-          </a:xfrm>
-          <a:prstGeom prst="rect">
-            <a:avLst/>
-          </a:prstGeom>
-        </p:spPr>
-      </p:pic>
-    </p:spTree>
-    <p:extLst>
-      <p:ext uri="{BB962C8B-B14F-4D97-AF65-F5344CB8AC3E}">
-        <p14:creationId xmlns:p14="http://schemas.microsoft.com/office/powerpoint/2010/main" val="2013358378"/>
-      </p:ext>
-    </p:extLst>
-  </p:cSld>
-  <p:clrMapOvr>
-    <a:masterClrMapping/>
-  </p:clrMapOvr>
-</p:sld>
-</file>
-
-<file path=ppt/slides/slide4.xml><?xml version="1.0" encoding="utf-8"?>
-<p:sld xmlns:a="http://schemas.openxmlformats.org/drawingml/2006/main" xmlns:r="http://schemas.openxmlformats.org/officeDocument/2006/relationships" xmlns:p="http://schemas.openxmlformats.org/presentationml/2006/main">
-  <p:cSld>
-    <p:spTree>
-      <p:nvGrpSpPr>
-        <p:cNvPr id="1" name="">
-          <a:extLst>
-            <a:ext uri="{FF2B5EF4-FFF2-40B4-BE49-F238E27FC236}">
-              <a16:creationId xmlns:a16="http://schemas.microsoft.com/office/drawing/2014/main" id="{C7F4FC59-067E-A15D-2833-DEFCA13D733C}"/>
-            </a:ext>
-          </a:extLst>
-        </p:cNvPr>
-        <p:cNvGrpSpPr/>
-        <p:nvPr/>
-      </p:nvGrpSpPr>
-      <p:grpSpPr>
-        <a:xfrm>
-          <a:off x="0" y="0"/>
-          <a:ext cx="0" cy="0"/>
-          <a:chOff x="0" y="0"/>
-          <a:chExt cx="0" cy="0"/>
-        </a:xfrm>
-      </p:grpSpPr>
-      <p:sp>
-        <p:nvSpPr>
-          <p:cNvPr id="9" name="Заголовок 8">
-            <a:extLst>
-              <a:ext uri="{FF2B5EF4-FFF2-40B4-BE49-F238E27FC236}">
-                <a16:creationId xmlns:a16="http://schemas.microsoft.com/office/drawing/2014/main" id="{FFD87AD7-A0C4-CC64-6392-8BA47003893C}"/>
-              </a:ext>
-            </a:extLst>
-          </p:cNvPr>
-          <p:cNvSpPr>
-            <a:spLocks noGrp="1"/>
-          </p:cNvSpPr>
-          <p:nvPr>
-            <p:ph type="title"/>
-          </p:nvPr>
-        </p:nvSpPr>
-        <p:spPr/>
-        <p:txBody>
-          <a:bodyPr/>
-          <a:lstStyle/>
-          <a:p>
-            <a:r>
-              <a:rPr lang="ru-RU" dirty="0"/>
-              <a:t> Технологический стек</a:t>
-            </a:r>
-          </a:p>
-        </p:txBody>
-      </p:sp>
-      <p:sp>
-        <p:nvSpPr>
-          <p:cNvPr id="5" name="Текст 4">
-            <a:extLst>
-              <a:ext uri="{FF2B5EF4-FFF2-40B4-BE49-F238E27FC236}">
-                <a16:creationId xmlns:a16="http://schemas.microsoft.com/office/drawing/2014/main" id="{5CC0F2A9-5EBC-310A-DC82-92D9478836B6}"/>
-              </a:ext>
-            </a:extLst>
-          </p:cNvPr>
-          <p:cNvSpPr>
-            <a:spLocks noGrp="1"/>
-          </p:cNvSpPr>
-          <p:nvPr>
-            <p:ph type="body" sz="quarter" idx="12"/>
-          </p:nvPr>
-        </p:nvSpPr>
-        <p:spPr>
-          <a:xfrm>
-            <a:off x="550864" y="1341438"/>
-            <a:ext cx="5284786" cy="5040312"/>
-          </a:xfrm>
-        </p:spPr>
-        <p:txBody>
-          <a:bodyPr>
-            <a:normAutofit/>
-          </a:bodyPr>
-          <a:lstStyle/>
-          <a:p>
-            <a:pPr lvl="5">
-              <a:lnSpc>
-                <a:spcPct val="120000"/>
-              </a:lnSpc>
-            </a:pPr>
-            <a:r>
-              <a:rPr lang="ru-RU" dirty="0"/>
-              <a:t>Бэкенд: </a:t>
-            </a:r>
-            <a:r>
-              <a:rPr lang="en-US" dirty="0"/>
-              <a:t>Kotlin + </a:t>
-            </a:r>
-            <a:r>
-              <a:rPr lang="en-US" dirty="0" err="1"/>
-              <a:t>Ktor</a:t>
-            </a:r>
-            <a:r>
-              <a:rPr lang="en-US" dirty="0"/>
-              <a:t> (</a:t>
-            </a:r>
-            <a:r>
-              <a:rPr lang="ru-RU" dirty="0"/>
-              <a:t>высокая производительность, асинхронность)</a:t>
-            </a:r>
-          </a:p>
-          <a:p>
-            <a:pPr lvl="5">
-              <a:lnSpc>
-                <a:spcPct val="120000"/>
-              </a:lnSpc>
-            </a:pPr>
-            <a:r>
-              <a:rPr lang="ru-RU" dirty="0"/>
-              <a:t>Приложение</a:t>
-            </a:r>
-            <a:r>
-              <a:rPr lang="en-US" dirty="0"/>
-              <a:t>: KMP (</a:t>
-            </a:r>
-            <a:r>
-              <a:rPr lang="ru-RU" dirty="0"/>
-              <a:t>унификация для всех систем)</a:t>
-            </a:r>
-          </a:p>
-          <a:p>
-            <a:pPr lvl="5">
-              <a:lnSpc>
-                <a:spcPct val="120000"/>
-              </a:lnSpc>
-            </a:pPr>
-            <a:r>
-              <a:rPr lang="ru-RU" dirty="0"/>
-              <a:t>Целевые ОС</a:t>
-            </a:r>
-            <a:r>
-              <a:rPr lang="en-US" dirty="0"/>
-              <a:t>: Android, IOS</a:t>
-            </a:r>
-            <a:endParaRPr lang="ru-RU" dirty="0"/>
-          </a:p>
-          <a:p>
-            <a:pPr lvl="5">
-              <a:lnSpc>
-                <a:spcPct val="120000"/>
-              </a:lnSpc>
-            </a:pPr>
-            <a:r>
-              <a:rPr lang="ru-RU" dirty="0"/>
-              <a:t>База данных: </a:t>
-            </a:r>
-            <a:r>
-              <a:rPr lang="en-US" dirty="0"/>
-              <a:t>PostgreSQL (</a:t>
-            </a:r>
-            <a:r>
-              <a:rPr lang="ru-RU" dirty="0"/>
-              <a:t>надежное хранение данных)</a:t>
-            </a:r>
-          </a:p>
-          <a:p>
-            <a:pPr lvl="5">
-              <a:lnSpc>
-                <a:spcPct val="120000"/>
-              </a:lnSpc>
-            </a:pPr>
-            <a:r>
-              <a:rPr lang="ru-RU" dirty="0"/>
-              <a:t>Деплой: </a:t>
-            </a:r>
-            <a:r>
-              <a:rPr lang="en-US" dirty="0"/>
-              <a:t>Docker</a:t>
-            </a:r>
-            <a:endParaRPr lang="ru-RU" dirty="0"/>
-          </a:p>
-        </p:txBody>
-      </p:sp>
-      <p:pic>
-        <p:nvPicPr>
-          <p:cNvPr id="2050" name="Picture 2" descr="GitHub - ktorio/ktor: Framework for quickly creating connected applications  in Kotlin with minimal effort">
-            <a:extLst>
-              <a:ext uri="{FF2B5EF4-FFF2-40B4-BE49-F238E27FC236}">
-                <a16:creationId xmlns:a16="http://schemas.microsoft.com/office/drawing/2014/main" id="{5A468302-E9EF-9450-136A-3EF807EF303F}"/>
-              </a:ext>
-            </a:extLst>
-          </p:cNvPr>
-          <p:cNvPicPr>
-            <a:picLocks noChangeAspect="1" noChangeArrowheads="1"/>
-          </p:cNvPicPr>
-          <p:nvPr/>
-        </p:nvPicPr>
-        <p:blipFill>
-          <a:blip r:embed="rId3">
-            <a:extLst>
-              <a:ext uri="{28A0092B-C50C-407E-A947-70E740481C1C}">
-                <a14:useLocalDpi xmlns:a14="http://schemas.microsoft.com/office/drawing/2010/main" val="0"/>
-              </a:ext>
-            </a:extLst>
-          </a:blip>
-          <a:srcRect/>
-          <a:stretch>
-            <a:fillRect/>
-          </a:stretch>
-        </p:blipFill>
-        <p:spPr bwMode="auto">
-          <a:xfrm>
-            <a:off x="6701798" y="1022434"/>
-            <a:ext cx="2755023" cy="1147209"/>
-          </a:xfrm>
-          <a:prstGeom prst="rect">
-            <a:avLst/>
-          </a:prstGeom>
-          <a:noFill/>
-          <a:extLst>
-            <a:ext uri="{909E8E84-426E-40DD-AFC4-6F175D3DCCD1}">
-              <a14:hiddenFill xmlns:a14="http://schemas.microsoft.com/office/drawing/2010/main">
-                <a:solidFill>
-                  <a:srgbClr val="FFFFFF"/>
-                </a:solidFill>
-              </a14:hiddenFill>
-            </a:ext>
-          </a:extLst>
-        </p:spPr>
-      </p:pic>
-      <p:pic>
-        <p:nvPicPr>
-          <p:cNvPr id="2054" name="Picture 6" descr="В Ria.ru поменяли Oracle на PostgreSQL : Компания Postgres Professional">
-            <a:extLst>
-              <a:ext uri="{FF2B5EF4-FFF2-40B4-BE49-F238E27FC236}">
-                <a16:creationId xmlns:a16="http://schemas.microsoft.com/office/drawing/2014/main" id="{1B137CF6-FD49-F11A-159F-62F65A8AD0CC}"/>
-              </a:ext>
-            </a:extLst>
-          </p:cNvPr>
-          <p:cNvPicPr>
-            <a:picLocks noChangeAspect="1" noChangeArrowheads="1"/>
-          </p:cNvPicPr>
-          <p:nvPr/>
-        </p:nvPicPr>
-        <p:blipFill>
-          <a:blip r:embed="rId4">
-            <a:extLst>
-              <a:ext uri="{28A0092B-C50C-407E-A947-70E740481C1C}">
-                <a14:useLocalDpi xmlns:a14="http://schemas.microsoft.com/office/drawing/2010/main" val="0"/>
-              </a:ext>
-            </a:extLst>
-          </a:blip>
-          <a:srcRect/>
-          <a:stretch>
-            <a:fillRect/>
-          </a:stretch>
-        </p:blipFill>
-        <p:spPr bwMode="auto">
-          <a:xfrm>
-            <a:off x="6737996" y="2541186"/>
-            <a:ext cx="2472633" cy="1134979"/>
-          </a:xfrm>
-          <a:prstGeom prst="rect">
-            <a:avLst/>
-          </a:prstGeom>
-          <a:noFill/>
-          <a:extLst>
-            <a:ext uri="{909E8E84-426E-40DD-AFC4-6F175D3DCCD1}">
-              <a14:hiddenFill xmlns:a14="http://schemas.microsoft.com/office/drawing/2010/main">
-                <a:solidFill>
-                  <a:srgbClr val="FFFFFF"/>
-                </a:solidFill>
-              </a14:hiddenFill>
-            </a:ext>
-          </a:extLst>
-        </p:spPr>
-      </p:pic>
-      <p:pic>
-        <p:nvPicPr>
-          <p:cNvPr id="2060" name="Picture 12">
-            <a:extLst>
-              <a:ext uri="{FF2B5EF4-FFF2-40B4-BE49-F238E27FC236}">
-                <a16:creationId xmlns:a16="http://schemas.microsoft.com/office/drawing/2014/main" id="{7DB34DF2-DBF6-26FA-88EB-76691354C8D4}"/>
-              </a:ext>
-            </a:extLst>
-          </p:cNvPr>
-          <p:cNvPicPr>
-            <a:picLocks noChangeAspect="1" noChangeArrowheads="1"/>
-          </p:cNvPicPr>
-          <p:nvPr/>
-        </p:nvPicPr>
-        <p:blipFill>
-          <a:blip r:embed="rId5">
-            <a:extLst>
-              <a:ext uri="{28A0092B-C50C-407E-A947-70E740481C1C}">
-                <a14:useLocalDpi xmlns:a14="http://schemas.microsoft.com/office/drawing/2010/main" val="0"/>
-              </a:ext>
-            </a:extLst>
-          </a:blip>
-          <a:srcRect/>
-          <a:stretch>
-            <a:fillRect/>
-          </a:stretch>
-        </p:blipFill>
-        <p:spPr bwMode="auto">
-          <a:xfrm>
-            <a:off x="9044613" y="2064622"/>
-            <a:ext cx="2556711" cy="581586"/>
-          </a:xfrm>
-          <a:prstGeom prst="rect">
-            <a:avLst/>
-          </a:prstGeom>
-          <a:noFill/>
-          <a:extLst>
-            <a:ext uri="{909E8E84-426E-40DD-AFC4-6F175D3DCCD1}">
-              <a14:hiddenFill xmlns:a14="http://schemas.microsoft.com/office/drawing/2010/main">
-                <a:solidFill>
-                  <a:srgbClr val="FFFFFF"/>
-                </a:solidFill>
-              </a14:hiddenFill>
-            </a:ext>
-          </a:extLst>
-        </p:spPr>
-      </p:pic>
-      <p:pic>
-        <p:nvPicPr>
-          <p:cNvPr id="1026" name="Picture 2" descr="Picture background">
-            <a:extLst>
-              <a:ext uri="{FF2B5EF4-FFF2-40B4-BE49-F238E27FC236}">
-                <a16:creationId xmlns:a16="http://schemas.microsoft.com/office/drawing/2014/main" id="{0E9FFC0C-9F90-2A12-016A-678B540EEC3E}"/>
-              </a:ext>
-            </a:extLst>
-          </p:cNvPr>
-          <p:cNvPicPr>
-            <a:picLocks noChangeAspect="1" noChangeArrowheads="1"/>
-          </p:cNvPicPr>
-          <p:nvPr/>
-        </p:nvPicPr>
-        <p:blipFill>
-          <a:blip r:embed="rId6">
-            <a:extLst>
-              <a:ext uri="{28A0092B-C50C-407E-A947-70E740481C1C}">
-                <a14:useLocalDpi xmlns:a14="http://schemas.microsoft.com/office/drawing/2010/main" val="0"/>
-              </a:ext>
-            </a:extLst>
-          </a:blip>
-          <a:srcRect/>
-          <a:stretch>
-            <a:fillRect/>
-          </a:stretch>
-        </p:blipFill>
-        <p:spPr bwMode="auto">
-          <a:xfrm>
-            <a:off x="6096000" y="4488205"/>
-            <a:ext cx="2472634" cy="1614015"/>
-          </a:xfrm>
-          <a:prstGeom prst="rect">
-            <a:avLst/>
-          </a:prstGeom>
-          <a:noFill/>
-          <a:extLst>
-            <a:ext uri="{909E8E84-426E-40DD-AFC4-6F175D3DCCD1}">
-              <a14:hiddenFill xmlns:a14="http://schemas.microsoft.com/office/drawing/2010/main">
-                <a:solidFill>
-                  <a:srgbClr val="FFFFFF"/>
-                </a:solidFill>
-              </a14:hiddenFill>
-            </a:ext>
-          </a:extLst>
-        </p:spPr>
-      </p:pic>
-      <p:pic>
-        <p:nvPicPr>
-          <p:cNvPr id="1028" name="Picture 4" descr="Picture background">
-            <a:extLst>
-              <a:ext uri="{FF2B5EF4-FFF2-40B4-BE49-F238E27FC236}">
-                <a16:creationId xmlns:a16="http://schemas.microsoft.com/office/drawing/2014/main" id="{F65FAB24-9B74-758A-965F-BC6399E1E153}"/>
-              </a:ext>
-            </a:extLst>
-          </p:cNvPr>
-          <p:cNvPicPr>
-            <a:picLocks noChangeAspect="1" noChangeArrowheads="1"/>
-          </p:cNvPicPr>
-          <p:nvPr/>
-        </p:nvPicPr>
-        <p:blipFill>
-          <a:blip r:embed="rId7">
-            <a:extLst>
-              <a:ext uri="{28A0092B-C50C-407E-A947-70E740481C1C}">
-                <a14:useLocalDpi xmlns:a14="http://schemas.microsoft.com/office/drawing/2010/main" val="0"/>
-              </a:ext>
-            </a:extLst>
-          </a:blip>
-          <a:srcRect/>
-          <a:stretch>
-            <a:fillRect/>
-          </a:stretch>
-        </p:blipFill>
-        <p:spPr bwMode="auto">
-          <a:xfrm>
-            <a:off x="8718401" y="4211793"/>
-            <a:ext cx="2756114" cy="1707502"/>
-          </a:xfrm>
-          <a:prstGeom prst="rect">
-            <a:avLst/>
-          </a:prstGeom>
-          <a:noFill/>
-          <a:extLst>
-            <a:ext uri="{909E8E84-426E-40DD-AFC4-6F175D3DCCD1}">
-              <a14:hiddenFill xmlns:a14="http://schemas.microsoft.com/office/drawing/2010/main">
-                <a:solidFill>
-                  <a:srgbClr val="FFFFFF"/>
-                </a:solidFill>
-              </a14:hiddenFill>
-            </a:ext>
-          </a:extLst>
-        </p:spPr>
-      </p:pic>
-    </p:spTree>
-    <p:extLst>
-      <p:ext uri="{BB962C8B-B14F-4D97-AF65-F5344CB8AC3E}">
-        <p14:creationId xmlns:p14="http://schemas.microsoft.com/office/powerpoint/2010/main" val="2338284192"/>
-      </p:ext>
-    </p:extLst>
-  </p:cSld>
-  <p:clrMapOvr>
-    <a:masterClrMapping/>
-  </p:clrMapOvr>
-</p:sld>
-</file>
-
-<file path=ppt/slides/slide5.xml><?xml version="1.0" encoding="utf-8"?>
-<p:sld xmlns:a="http://schemas.openxmlformats.org/drawingml/2006/main" xmlns:r="http://schemas.openxmlformats.org/officeDocument/2006/relationships" xmlns:p="http://schemas.openxmlformats.org/presentationml/2006/main">
-  <p:cSld>
-    <p:spTree>
-      <p:nvGrpSpPr>
-        <p:cNvPr id="1" name="">
-          <a:extLst>
-            <a:ext uri="{FF2B5EF4-FFF2-40B4-BE49-F238E27FC236}">
               <a16:creationId xmlns:a16="http://schemas.microsoft.com/office/drawing/2014/main" id="{F32F2E91-9689-3F2B-A53F-6F59B9F8AEB9}"/>
             </a:ext>
           </a:extLst>
@@ -6196,123 +5179,12 @@
           </a:p>
         </p:txBody>
       </p:sp>
-      <p:sp>
-        <p:nvSpPr>
-          <p:cNvPr id="5" name="Текст 4">
-            <a:extLst>
-              <a:ext uri="{FF2B5EF4-FFF2-40B4-BE49-F238E27FC236}">
-                <a16:creationId xmlns:a16="http://schemas.microsoft.com/office/drawing/2014/main" id="{EEFC04D0-078C-14D6-4CBE-7FC8D9941DD4}"/>
-              </a:ext>
-            </a:extLst>
-          </p:cNvPr>
-          <p:cNvSpPr>
-            <a:spLocks noGrp="1"/>
-          </p:cNvSpPr>
-          <p:nvPr>
-            <p:ph type="body" sz="quarter" idx="12"/>
-          </p:nvPr>
-        </p:nvSpPr>
-        <p:spPr>
-          <a:xfrm>
-            <a:off x="550864" y="1341438"/>
-            <a:ext cx="6068390" cy="5040312"/>
-          </a:xfrm>
-        </p:spPr>
-        <p:txBody>
-          <a:bodyPr>
-            <a:normAutofit/>
-          </a:bodyPr>
-          <a:lstStyle/>
-          <a:p>
-            <a:pPr marL="0" lvl="5" indent="0">
-              <a:lnSpc>
-                <a:spcPct val="120000"/>
-              </a:lnSpc>
-              <a:buNone/>
-            </a:pPr>
-            <a:r>
-              <a:rPr lang="ru-RU" dirty="0"/>
-              <a:t>Архитектура: Трехслойная (Domain, Data, </a:t>
-            </a:r>
-            <a:r>
-              <a:rPr lang="ru-RU" dirty="0" err="1"/>
-              <a:t>Presentation</a:t>
-            </a:r>
-            <a:r>
-              <a:rPr lang="ru-RU" dirty="0"/>
-              <a:t>) для чистоты кода и масштабируемости.</a:t>
-            </a:r>
-          </a:p>
-          <a:p>
-            <a:pPr marL="0" lvl="5" indent="0">
-              <a:lnSpc>
-                <a:spcPct val="120000"/>
-              </a:lnSpc>
-              <a:buNone/>
-            </a:pPr>
-            <a:r>
-              <a:rPr lang="ru-RU" dirty="0"/>
-              <a:t>Real-</a:t>
-            </a:r>
-            <a:r>
-              <a:rPr lang="ru-RU" dirty="0" err="1"/>
-              <a:t>time</a:t>
-            </a:r>
-            <a:r>
-              <a:rPr lang="ru-RU" dirty="0"/>
-              <a:t> обновления:</a:t>
-            </a:r>
-          </a:p>
-          <a:p>
-            <a:pPr lvl="5">
-              <a:lnSpc>
-                <a:spcPct val="120000"/>
-              </a:lnSpc>
-            </a:pPr>
-            <a:r>
-              <a:rPr lang="ru-RU" dirty="0" err="1"/>
-              <a:t>WebSocket</a:t>
-            </a:r>
-            <a:r>
-              <a:rPr lang="ru-RU" dirty="0"/>
-              <a:t>: Все вкладки пользователя используют одно соединение, что снижает нагрузку на сервер.</a:t>
-            </a:r>
-          </a:p>
-          <a:p>
-            <a:pPr lvl="5">
-              <a:lnSpc>
-                <a:spcPct val="120000"/>
-              </a:lnSpc>
-            </a:pPr>
-            <a:r>
-              <a:rPr lang="ru-RU" dirty="0" err="1"/>
-              <a:t>Backflow</a:t>
-            </a:r>
-            <a:r>
-              <a:rPr lang="ru-RU" dirty="0"/>
-              <a:t> Manager: Мгновенная доставка изменений (например, перемещение карточки в канбане) всем участникам проекта.</a:t>
-            </a:r>
-          </a:p>
-          <a:p>
-            <a:pPr marL="0" lvl="5" indent="0">
-              <a:lnSpc>
-                <a:spcPct val="120000"/>
-              </a:lnSpc>
-              <a:buNone/>
-            </a:pPr>
-            <a:r>
-              <a:rPr lang="ru-RU" dirty="0"/>
-              <a:t>Безопасность: JWT-авторизация и HTTPS.</a:t>
-            </a:r>
-          </a:p>
-        </p:txBody>
-      </p:sp>
       <p:pic>
         <p:nvPicPr>
-          <p:cNvPr id="2" name="Рисунок 1" descr="Изображение выглядит как снимок экрана, текст, дизайн&#10;&#10;Автоматически созданное описание">
-            <a:extLst>
-              <a:ext uri="{FF2B5EF4-FFF2-40B4-BE49-F238E27FC236}">
-                <a16:creationId xmlns:a16="http://schemas.microsoft.com/office/drawing/2014/main" id="{96CA0FA2-A57B-4448-E755-5F99808E870C}"/>
+          <p:cNvPr id="12" name="Рисунок 11">
+            <a:extLst>
+              <a:ext uri="{FF2B5EF4-FFF2-40B4-BE49-F238E27FC236}">
+                <a16:creationId xmlns:a16="http://schemas.microsoft.com/office/drawing/2014/main" id="{39F6F1B4-6186-079A-2DE8-B4EB61D67CB6}"/>
               </a:ext>
             </a:extLst>
           </p:cNvPr>
@@ -6322,71 +5194,19 @@
           <p:nvPr/>
         </p:nvPicPr>
         <p:blipFill>
-          <a:blip r:embed="rId3">
-            <a:extLst>
-              <a:ext uri="{28A0092B-C50C-407E-A947-70E740481C1C}">
-                <a14:useLocalDpi xmlns:a14="http://schemas.microsoft.com/office/drawing/2010/main" val="0"/>
-              </a:ext>
-            </a:extLst>
-          </a:blip>
-          <a:srcRect/>
+          <a:blip r:embed="rId3"/>
           <a:stretch>
             <a:fillRect/>
           </a:stretch>
         </p:blipFill>
-        <p:spPr bwMode="auto">
+        <p:spPr>
           <a:xfrm>
-            <a:off x="6619254" y="1090411"/>
-            <a:ext cx="5021882" cy="5331086"/>
+            <a:off x="1003105" y="1038360"/>
+            <a:ext cx="10185790" cy="5732553"/>
           </a:xfrm>
           <a:prstGeom prst="rect">
             <a:avLst/>
           </a:prstGeom>
-          <a:noFill/>
-          <a:ln>
-            <a:noFill/>
-          </a:ln>
-        </p:spPr>
-      </p:pic>
-      <p:pic>
-        <p:nvPicPr>
-          <p:cNvPr id="6" name="Рисунок 5" descr="Изображение выглядит как диаграмма, линия, План, текст&#10;&#10;Автоматически созданное описание">
-            <a:extLst>
-              <a:ext uri="{FF2B5EF4-FFF2-40B4-BE49-F238E27FC236}">
-                <a16:creationId xmlns:a16="http://schemas.microsoft.com/office/drawing/2014/main" id="{1A325D42-5514-9544-72C4-9A825DB1446D}"/>
-              </a:ext>
-            </a:extLst>
-          </p:cNvPr>
-          <p:cNvPicPr>
-            <a:picLocks noChangeAspect="1"/>
-          </p:cNvPicPr>
-          <p:nvPr/>
-        </p:nvPicPr>
-        <p:blipFill>
-          <a:blip r:embed="rId4">
-            <a:extLst>
-              <a:ext uri="{28A0092B-C50C-407E-A947-70E740481C1C}">
-                <a14:useLocalDpi xmlns:a14="http://schemas.microsoft.com/office/drawing/2010/main" val="0"/>
-              </a:ext>
-            </a:extLst>
-          </a:blip>
-          <a:srcRect/>
-          <a:stretch>
-            <a:fillRect/>
-          </a:stretch>
-        </p:blipFill>
-        <p:spPr bwMode="auto">
-          <a:xfrm>
-            <a:off x="550863" y="5143574"/>
-            <a:ext cx="5687511" cy="1258049"/>
-          </a:xfrm>
-          <a:prstGeom prst="rect">
-            <a:avLst/>
-          </a:prstGeom>
-          <a:noFill/>
-          <a:ln>
-            <a:noFill/>
-          </a:ln>
         </p:spPr>
       </p:pic>
     </p:spTree>
@@ -6402,7 +5222,7 @@
 </p:sld>
 </file>
 
-<file path=ppt/slides/slide6.xml><?xml version="1.0" encoding="utf-8"?>
+<file path=ppt/slides/slide4.xml><?xml version="1.0" encoding="utf-8"?>
 <p:sld xmlns:a="http://schemas.openxmlformats.org/drawingml/2006/main" xmlns:r="http://schemas.openxmlformats.org/officeDocument/2006/relationships" xmlns:p="http://schemas.openxmlformats.org/presentationml/2006/main">
   <p:cSld>
     <p:spTree>
@@ -6616,7 +5436,7 @@
 </p:sld>
 </file>
 
-<file path=ppt/slides/slide7.xml><?xml version="1.0" encoding="utf-8"?>
+<file path=ppt/slides/slide5.xml><?xml version="1.0" encoding="utf-8"?>
 <p:sld xmlns:a="http://schemas.openxmlformats.org/drawingml/2006/main" xmlns:r="http://schemas.openxmlformats.org/officeDocument/2006/relationships" xmlns:p="http://schemas.openxmlformats.org/presentationml/2006/main">
   <p:cSld>
     <p:spTree>
@@ -6821,165 +5641,6 @@
     <p:extLst>
       <p:ext uri="{BB962C8B-B14F-4D97-AF65-F5344CB8AC3E}">
         <p14:creationId xmlns:p14="http://schemas.microsoft.com/office/powerpoint/2010/main" val="263889552"/>
-      </p:ext>
-    </p:extLst>
-  </p:cSld>
-  <p:clrMapOvr>
-    <a:masterClrMapping/>
-  </p:clrMapOvr>
-</p:sld>
-</file>
-
-<file path=ppt/slides/slide8.xml><?xml version="1.0" encoding="utf-8"?>
-<p:sld xmlns:a="http://schemas.openxmlformats.org/drawingml/2006/main" xmlns:r="http://schemas.openxmlformats.org/officeDocument/2006/relationships" xmlns:p="http://schemas.openxmlformats.org/presentationml/2006/main">
-  <p:cSld>
-    <p:spTree>
-      <p:nvGrpSpPr>
-        <p:cNvPr id="1" name="">
-          <a:extLst>
-            <a:ext uri="{FF2B5EF4-FFF2-40B4-BE49-F238E27FC236}">
-              <a16:creationId xmlns:a16="http://schemas.microsoft.com/office/drawing/2014/main" id="{D98FC6DB-F633-5F00-2191-818DDF4B6160}"/>
-            </a:ext>
-          </a:extLst>
-        </p:cNvPr>
-        <p:cNvGrpSpPr/>
-        <p:nvPr/>
-      </p:nvGrpSpPr>
-      <p:grpSpPr>
-        <a:xfrm>
-          <a:off x="0" y="0"/>
-          <a:ext cx="0" cy="0"/>
-          <a:chOff x="0" y="0"/>
-          <a:chExt cx="0" cy="0"/>
-        </a:xfrm>
-      </p:grpSpPr>
-      <p:sp>
-        <p:nvSpPr>
-          <p:cNvPr id="9" name="Заголовок 8">
-            <a:extLst>
-              <a:ext uri="{FF2B5EF4-FFF2-40B4-BE49-F238E27FC236}">
-                <a16:creationId xmlns:a16="http://schemas.microsoft.com/office/drawing/2014/main" id="{698055C3-13CF-603F-C5F9-19A971CDDC73}"/>
-              </a:ext>
-            </a:extLst>
-          </p:cNvPr>
-          <p:cNvSpPr>
-            <a:spLocks noGrp="1"/>
-          </p:cNvSpPr>
-          <p:nvPr>
-            <p:ph type="title"/>
-          </p:nvPr>
-        </p:nvSpPr>
-        <p:spPr>
-          <a:xfrm>
-            <a:off x="550863" y="407976"/>
-            <a:ext cx="9608330" cy="332399"/>
-          </a:xfrm>
-        </p:spPr>
-        <p:txBody>
-          <a:bodyPr/>
-          <a:lstStyle/>
-          <a:p>
-            <a:r>
-              <a:rPr lang="ru-RU" dirty="0"/>
-              <a:t>Демонстрация</a:t>
-            </a:r>
-          </a:p>
-        </p:txBody>
-      </p:sp>
-      <p:pic>
-        <p:nvPicPr>
-          <p:cNvPr id="4" name="Рисунок 3">
-            <a:extLst>
-              <a:ext uri="{FF2B5EF4-FFF2-40B4-BE49-F238E27FC236}">
-                <a16:creationId xmlns:a16="http://schemas.microsoft.com/office/drawing/2014/main" id="{78D248DB-D0CF-3F0B-7A86-F3878700FFC0}"/>
-              </a:ext>
-            </a:extLst>
-          </p:cNvPr>
-          <p:cNvPicPr>
-            <a:picLocks noChangeAspect="1"/>
-          </p:cNvPicPr>
-          <p:nvPr/>
-        </p:nvPicPr>
-        <p:blipFill>
-          <a:blip r:embed="rId3"/>
-          <a:stretch>
-            <a:fillRect/>
-          </a:stretch>
-        </p:blipFill>
-        <p:spPr>
-          <a:xfrm>
-            <a:off x="550863" y="1125894"/>
-            <a:ext cx="3926996" cy="4471997"/>
-          </a:xfrm>
-          <a:prstGeom prst="rect">
-            <a:avLst/>
-          </a:prstGeom>
-        </p:spPr>
-      </p:pic>
-      <p:pic>
-        <p:nvPicPr>
-          <p:cNvPr id="7" name="Рисунок 6">
-            <a:extLst>
-              <a:ext uri="{FF2B5EF4-FFF2-40B4-BE49-F238E27FC236}">
-                <a16:creationId xmlns:a16="http://schemas.microsoft.com/office/drawing/2014/main" id="{8518BB89-4763-094D-B392-7CED1E80DA8F}"/>
-              </a:ext>
-            </a:extLst>
-          </p:cNvPr>
-          <p:cNvPicPr>
-            <a:picLocks noChangeAspect="1"/>
-          </p:cNvPicPr>
-          <p:nvPr/>
-        </p:nvPicPr>
-        <p:blipFill>
-          <a:blip r:embed="rId4"/>
-          <a:stretch>
-            <a:fillRect/>
-          </a:stretch>
-        </p:blipFill>
-        <p:spPr>
-          <a:xfrm>
-            <a:off x="4593198" y="1125894"/>
-            <a:ext cx="3005603" cy="2432407"/>
-          </a:xfrm>
-          <a:prstGeom prst="rect">
-            <a:avLst/>
-          </a:prstGeom>
-        </p:spPr>
-      </p:pic>
-      <p:pic>
-        <p:nvPicPr>
-          <p:cNvPr id="10" name="Рисунок 9">
-            <a:extLst>
-              <a:ext uri="{FF2B5EF4-FFF2-40B4-BE49-F238E27FC236}">
-                <a16:creationId xmlns:a16="http://schemas.microsoft.com/office/drawing/2014/main" id="{1D973E6E-B3A6-38B2-0A9C-830084117E49}"/>
-              </a:ext>
-            </a:extLst>
-          </p:cNvPr>
-          <p:cNvPicPr>
-            <a:picLocks noChangeAspect="1"/>
-          </p:cNvPicPr>
-          <p:nvPr/>
-        </p:nvPicPr>
-        <p:blipFill>
-          <a:blip r:embed="rId5"/>
-          <a:stretch>
-            <a:fillRect/>
-          </a:stretch>
-        </p:blipFill>
-        <p:spPr>
-          <a:xfrm>
-            <a:off x="8275135" y="1125894"/>
-            <a:ext cx="2808601" cy="4220547"/>
-          </a:xfrm>
-          <a:prstGeom prst="rect">
-            <a:avLst/>
-          </a:prstGeom>
-        </p:spPr>
-      </p:pic>
-    </p:spTree>
-    <p:extLst>
-      <p:ext uri="{BB962C8B-B14F-4D97-AF65-F5344CB8AC3E}">
-        <p14:creationId xmlns:p14="http://schemas.microsoft.com/office/powerpoint/2010/main" val="401468394"/>
       </p:ext>
     </p:extLst>
   </p:cSld>
